--- a/IICRA_RSR_R_CMGC_Executive_Summary.pptx
+++ b/IICRA_RSR_R_CMGC_Executive_Summary.pptx
@@ -233,6 +233,43 @@
 </p:presentation>
 </file>
 
+<file path=ppt/revisionInfo.xml><?xml version="1.0" encoding="utf-8"?>
+<p1510:revInfo xmlns:a="http://schemas.openxmlformats.org/drawingml/2006/main" xmlns:r="http://schemas.openxmlformats.org/officeDocument/2006/relationships" xmlns:p1510="http://schemas.microsoft.com/office/powerpoint/2015/10/main">
+  <p1510:revLst>
+    <p1510:client id="{7F8C3616-4994-4D49-99B3-B5A9011BFD49}" v="1" dt="2026-06-22T14:53:26.810"/>
+  </p1510:revLst>
+</p1510:revInfo>
+</file>
+
+<file path=ppt/changesInfos/changesInfo1.xml><?xml version="1.0" encoding="utf-8"?>
+<pc:chgInfo xmlns:a="http://schemas.openxmlformats.org/drawingml/2006/main" xmlns:r="http://schemas.openxmlformats.org/officeDocument/2006/relationships" xmlns:ac="http://schemas.microsoft.com/office/drawing/2013/main/command" xmlns:pc="http://schemas.microsoft.com/office/powerpoint/2013/main/command">
+  <pc:docChgLst>
+    <pc:chgData name="Ding, Derek (Analytical)" userId="515ae1e6-98be-470a-920b-6788e5a6ed00" providerId="ADAL" clId="{74F606F4-2E3D-4316-A35C-623FC42CBCA8}"/>
+    <pc:docChg chg="modSld">
+      <pc:chgData name="Ding, Derek (Analytical)" userId="515ae1e6-98be-470a-920b-6788e5a6ed00" providerId="ADAL" clId="{74F606F4-2E3D-4316-A35C-623FC42CBCA8}" dt="2026-06-22T14:53:33.014" v="36" actId="20577"/>
+      <pc:docMkLst>
+        <pc:docMk/>
+      </pc:docMkLst>
+      <pc:sldChg chg="modSp mod">
+        <pc:chgData name="Ding, Derek (Analytical)" userId="515ae1e6-98be-470a-920b-6788e5a6ed00" providerId="ADAL" clId="{74F606F4-2E3D-4316-A35C-623FC42CBCA8}" dt="2026-06-22T14:53:33.014" v="36" actId="20577"/>
+        <pc:sldMkLst>
+          <pc:docMk/>
+          <pc:sldMk cId="3110272117" sldId="306"/>
+        </pc:sldMkLst>
+        <pc:spChg chg="mod">
+          <ac:chgData name="Ding, Derek (Analytical)" userId="515ae1e6-98be-470a-920b-6788e5a6ed00" providerId="ADAL" clId="{74F606F4-2E3D-4316-A35C-623FC42CBCA8}" dt="2026-06-22T14:53:33.014" v="36" actId="20577"/>
+          <ac:spMkLst>
+            <pc:docMk/>
+            <pc:sldMk cId="3110272117" sldId="306"/>
+            <ac:spMk id="4" creationId="{00000000-0000-0000-0000-000000000000}"/>
+          </ac:spMkLst>
+        </pc:spChg>
+      </pc:sldChg>
+    </pc:docChg>
+  </pc:docChgLst>
+</pc:chgInfo>
+</file>
+
 <file path=ppt/handoutMasters/handoutMaster1.xml><?xml version="1.0" encoding="utf-8"?>
 <p:handoutMaster xmlns:a="http://schemas.openxmlformats.org/drawingml/2006/main" xmlns:r="http://schemas.openxmlformats.org/officeDocument/2006/relationships" xmlns:p="http://schemas.openxmlformats.org/presentationml/2006/main">
   <p:cSld>
@@ -315,7 +352,7 @@
           <a:p>
             <a:fld id="{51E76258-0CB2-5E46-BDCC-DEDAA3D29929}" type="datetime1">
               <a:rPr lang="en-US" smtClean="0"/>
-              <a:t>6/4/2026</a:t>
+              <a:t>6/22/2026</a:t>
             </a:fld>
             <a:endParaRPr lang="en-US"/>
           </a:p>
@@ -481,7 +518,7 @@
           <a:p>
             <a:fld id="{6CC18655-D016-D145-A70E-0F6F8E9B9A7C}" type="datetime1">
               <a:rPr lang="en-US" smtClean="0"/>
-              <a:t>6/4/2026</a:t>
+              <a:t>6/22/2026</a:t>
             </a:fld>
             <a:endParaRPr lang="en-US"/>
           </a:p>
@@ -2622,7 +2659,7 @@
             </a:pPr>
             <a:r>
               <a:rPr lang="en-US"/>
-              <a:t xml:space="preserve">Second level. Level 2 Body text can be Regular or Bold. Level 2 Body text can be Regular or Bold. </a:t>
+              <a:t>Second level. Level 2 Body text can be Regular or Bold. Level 2 Body text can be Regular or Bold. </a:t>
             </a:r>
           </a:p>
           <a:p>
@@ -3543,7 +3580,7 @@
             </a:pPr>
             <a:r>
               <a:rPr lang="en-US"/>
-              <a:t xml:space="preserve">Second level. Level 2 Body text can be Regular or Bold. Level 2 Body text can be Regular or Bold. </a:t>
+              <a:t>Second level. Level 2 Body text can be Regular or Bold. Level 2 Body text can be Regular or Bold. </a:t>
             </a:r>
           </a:p>
           <a:p>
@@ -3652,7 +3689,7 @@
             <a:pPr lvl="1"/>
             <a:r>
               <a:rPr lang="en-US"/>
-              <a:t xml:space="preserve">Second level. Level 2 Body text can be Regular or Bold. Level 2 Body text can be Regular or Bold. </a:t>
+              <a:t>Second level. Level 2 Body text can be Regular or Bold. Level 2 Body text can be Regular or Bold. </a:t>
             </a:r>
           </a:p>
           <a:p>
@@ -5054,7 +5091,7 @@
             </a:pPr>
             <a:r>
               <a:rPr lang="en-US"/>
-              <a:t xml:space="preserve">Second level. Level 2 Body text can be Regular or Bold. Level 2 Body text can be Regular or Bold. </a:t>
+              <a:t>Second level. Level 2 Body text can be Regular or Bold. Level 2 Body text can be Regular or Bold. </a:t>
             </a:r>
           </a:p>
           <a:p>
@@ -5285,7 +5322,7 @@
             </a:pPr>
             <a:r>
               <a:rPr lang="en-US"/>
-              <a:t xml:space="preserve">Second level. Level 2 Body text can be Regular or Bold. Level 2 Body text can be Regular or Bold. </a:t>
+              <a:t>Second level. Level 2 Body text can be Regular or Bold. Level 2 Body text can be Regular or Bold. </a:t>
             </a:r>
           </a:p>
           <a:p>
@@ -5405,7 +5442,7 @@
             </a:pPr>
             <a:r>
               <a:rPr lang="en-US"/>
-              <a:t xml:space="preserve">Second level. Level 2 Body text can be Regular or Bold. Level 2 Body text can be Regular or Bold. </a:t>
+              <a:t>Second level. Level 2 Body text can be Regular or Bold. Level 2 Body text can be Regular or Bold. </a:t>
             </a:r>
           </a:p>
           <a:p>
@@ -5978,7 +6015,7 @@
             </a:pPr>
             <a:r>
               <a:rPr lang="en-US"/>
-              <a:t xml:space="preserve">Level 2 Body text can be Regular or Bold. </a:t>
+              <a:t>Level 2 Body text can be Regular or Bold. </a:t>
             </a:r>
           </a:p>
           <a:p>
@@ -6766,45 +6803,49 @@
           <a:lstStyle/>
           <a:p>
             <a:r>
+              <a:rPr lang="en-US" sz="1800" dirty="0"/>
+              <a:t>Derek Ding</a:t>
+            </a:r>
+          </a:p>
+          <a:p>
+            <a:r>
+              <a:rPr lang="en-US" sz="1800" dirty="0"/>
+              <a:t>Managing Director</a:t>
+            </a:r>
+          </a:p>
+          <a:p>
+            <a:r>
+              <a:rPr lang="en-US" sz="1800" dirty="0"/>
+              <a:t>FS Methodologies</a:t>
+            </a:r>
+          </a:p>
+          <a:p>
+            <a:endParaRPr lang="en-US" sz="1800" dirty="0"/>
+          </a:p>
+          <a:p>
+            <a:r>
+              <a:rPr lang="en-US" sz="1800" dirty="0"/>
+              <a:t>Yoji, Imashuku</a:t>
+            </a:r>
+          </a:p>
+          <a:p>
+            <a:r>
               <a:rPr lang="en-US" sz="1800"/>
-              <a:t>Derek Ding</a:t>
-            </a:r>
-          </a:p>
-          <a:p>
-            <a:r>
-              <a:rPr lang="en-US" sz="1800"/>
-              <a:t>Sr Director</a:t>
-            </a:r>
-          </a:p>
-          <a:p>
-            <a:r>
-              <a:rPr lang="en-US" sz="1800"/>
-              <a:t>FS Methodologies</a:t>
-            </a:r>
-          </a:p>
-          <a:p>
-            <a:endParaRPr lang="en-US" sz="1800"/>
-          </a:p>
-          <a:p>
-            <a:r>
-              <a:rPr lang="en-US" sz="1800"/>
-              <a:t>[TBD]</a:t>
-            </a:r>
-          </a:p>
-          <a:p>
-            <a:r>
-              <a:rPr lang="en-US" sz="1800"/>
-              <a:t>[TBD]</a:t>
-            </a:r>
-          </a:p>
-          <a:p>
-            <a:r>
-              <a:rPr lang="en-US" sz="1800"/>
+              <a:t>Associate </a:t>
+            </a:r>
+            <a:r>
+              <a:rPr lang="en-US" sz="1800" dirty="0"/>
+              <a:t>Directo</a:t>
+            </a:r>
+          </a:p>
+          <a:p>
+            <a:r>
+              <a:rPr lang="en-US" sz="1800" dirty="0"/>
               <a:t>AQV</a:t>
             </a:r>
           </a:p>
           <a:p>
-            <a:endParaRPr lang="en-US" sz="1800"/>
+            <a:endParaRPr lang="en-US" sz="1800" dirty="0"/>
           </a:p>
         </p:txBody>
       </p:sp>
@@ -6830,7 +6871,7 @@
           <a:p>
             <a:r>
               <a:rPr lang="en-US"/>
-              <a:t xml:space="preserve">Copyright © 2016 by S&amp;P Global. </a:t>
+              <a:t>Copyright © 2016 by S&amp;P Global. </a:t>
             </a:r>
             <a:br>
               <a:rPr lang="en-US"/>
@@ -6936,7 +6977,6 @@
               <a:rPr lang="en-US" sz="1600" b="0"/>
               <a:t>The model applies exclusively to the insurance industry. It should only be used to derive the IICRAs for a designated combination of industry and country risks.</a:t>
             </a:r>
-            <a:endParaRPr lang="en-US" sz="1600" b="0"/>
           </a:p>
           <a:p>
             <a:pPr marL="342900" indent="-342900">
@@ -6999,7 +7039,7 @@
             </a:br>
             <a:r>
               <a:rPr lang="en-US" sz="1800"/>
-              <a:t xml:space="preserve"> </a:t>
+              <a:t> </a:t>
             </a:r>
           </a:p>
         </p:txBody>
@@ -7210,7 +7250,7 @@
         <p:fade/>
       </p:transition>
     </mc:Choice>
-    <mc:Fallback xmlns:p159="http://schemas.microsoft.com/office/powerpoint/2015/09/main" xmlns:p15="http://schemas.microsoft.com/office/powerpoint/2012/main" xmlns:a14="http://schemas.microsoft.com/office/drawing/2010/main" xmlns:wp="http://schemas.openxmlformats.org/drawingml/2006/wordprocessingDrawing" xmlns:w="http://schemas.openxmlformats.org/wordprocessingml/2006/main" xmlns:m="http://schemas.openxmlformats.org/officeDocument/2006/math" xmlns="">
+    <mc:Fallback xmlns="" xmlns:m="http://schemas.openxmlformats.org/officeDocument/2006/math" xmlns:w="http://schemas.openxmlformats.org/wordprocessingml/2006/main" xmlns:wp="http://schemas.openxmlformats.org/drawingml/2006/wordprocessingDrawing" xmlns:a14="http://schemas.microsoft.com/office/drawing/2010/main" xmlns:p15="http://schemas.microsoft.com/office/powerpoint/2012/main" xmlns:p159="http://schemas.microsoft.com/office/powerpoint/2015/09/main">
       <p:transition spd="med">
         <p:fade/>
       </p:transition>
@@ -7262,11 +7302,7 @@
             </a:pPr>
             <a:r>
               <a:rPr lang="en-US" sz="1400" b="0"/>
-              <a:t xml:space="preserve">Effective Date of the Changes: </a:t>
-            </a:r>
-            <a:r>
-              <a:rPr lang="en-US" sz="1400" b="0"/>
-              <a:t>Effective July 2026</a:t>
+              <a:t>Effective Date of the Changes: Effective July 2026</a:t>
             </a:r>
           </a:p>
           <a:p>
@@ -7279,7 +7315,7 @@
           <a:p>
             <a:r>
               <a:rPr lang="en-US" sz="1400" b="0"/>
-              <a:t xml:space="preserve">      Summary Description of changes since last version approved by CMGC/Board of Managers: </a:t>
+              <a:t>      Summary Description of changes since last version approved by CMGC/Board of Managers: </a:t>
             </a:r>
           </a:p>
           <a:p>
@@ -7397,7 +7433,7 @@
         <p:fade/>
       </p:transition>
     </mc:Choice>
-    <mc:Fallback xmlns:p159="http://schemas.microsoft.com/office/powerpoint/2015/09/main" xmlns:p15="http://schemas.microsoft.com/office/powerpoint/2012/main" xmlns:a14="http://schemas.microsoft.com/office/drawing/2010/main" xmlns:wp="http://schemas.openxmlformats.org/drawingml/2006/wordprocessingDrawing" xmlns:w="http://schemas.openxmlformats.org/wordprocessingml/2006/main" xmlns:m="http://schemas.openxmlformats.org/officeDocument/2006/math" xmlns="">
+    <mc:Fallback xmlns="" xmlns:m="http://schemas.openxmlformats.org/officeDocument/2006/math" xmlns:w="http://schemas.openxmlformats.org/wordprocessingml/2006/main" xmlns:wp="http://schemas.openxmlformats.org/drawingml/2006/wordprocessingDrawing" xmlns:a14="http://schemas.microsoft.com/office/drawing/2010/main" xmlns:p15="http://schemas.microsoft.com/office/powerpoint/2012/main" xmlns:p159="http://schemas.microsoft.com/office/powerpoint/2015/09/main">
       <p:transition spd="med">
         <p:fade/>
       </p:transition>
@@ -7556,21 +7592,14 @@
                 <a:latin typeface="Arial"/>
                 <a:cs typeface="Arial"/>
               </a:rPr>
-              <a:t xml:space="preserve">A total number of </a:t>
-            </a:r>
-            <a:r>
-              <a:rPr lang="en-US" sz="1200" b="0">
-                <a:latin typeface="Arial"/>
-                <a:cs typeface="Arial"/>
-              </a:rPr>
-              <a:t xml:space="preserve">[#] </a:t>
+              <a:t>A total number of [#] </a:t>
             </a:r>
             <a:r>
               <a:rPr lang="en-US" sz="1200">
                 <a:latin typeface="Arial"/>
                 <a:cs typeface="Arial"/>
               </a:rPr>
-              <a:t xml:space="preserve">unit </a:t>
+              <a:t>unit </a:t>
             </a:r>
             <a:r>
               <a:rPr lang="en-US" sz="1200" b="0">
@@ -7600,21 +7629,7 @@
                 <a:latin typeface="Arial"/>
                 <a:cs typeface="Arial"/>
               </a:rPr>
-              <a:t xml:space="preserve">The unit test coverage for all components comprising the model was </a:t>
-            </a:r>
-            <a:r>
-              <a:rPr lang="en-US" sz="1200" b="0">
-                <a:latin typeface="Arial"/>
-                <a:cs typeface="Arial"/>
-              </a:rPr>
-              <a:t>[#]</a:t>
-            </a:r>
-            <a:r>
-              <a:rPr lang="en-US" sz="1200" b="0">
-                <a:latin typeface="Arial"/>
-                <a:cs typeface="Arial"/>
-              </a:rPr>
-              <a:t xml:space="preserve"> %.</a:t>
+              <a:t>The unit test coverage for all components comprising the model was [#] %.</a:t>
             </a:r>
           </a:p>
           <a:p>
@@ -7706,7 +7721,7 @@
                 <a:latin typeface="Arial"/>
                 <a:cs typeface="Arial"/>
               </a:rPr>
-              <a:t xml:space="preserve"> integration test scenarios were created to ensure end-to-end calculations behave as expected. </a:t>
+              <a:t> integration test scenarios were created to ensure end-to-end calculations behave as expected. </a:t>
             </a:r>
           </a:p>
           <a:p>
@@ -7782,7 +7797,7 @@
                 <a:latin typeface="Arial" pitchFamily="34" charset="0"/>
                 <a:cs typeface="Arial" pitchFamily="34" charset="0"/>
               </a:rPr>
-              <a:t xml:space="preserve">There were </a:t>
+              <a:t>There were </a:t>
             </a:r>
             <a:r>
               <a:rPr lang="en-US" sz="1200" b="0" u="sng">
@@ -7796,7 +7811,7 @@
                 <a:latin typeface="Arial" pitchFamily="34" charset="0"/>
                 <a:cs typeface="Arial" pitchFamily="34" charset="0"/>
               </a:rPr>
-              <a:t xml:space="preserve"> issues reported during the unit, UI, and integration test runs. </a:t>
+              <a:t> issues reported during the unit, UI, and integration test runs. </a:t>
             </a:r>
           </a:p>
           <a:p>
@@ -7837,7 +7852,7 @@
         <p:fade/>
       </p:transition>
     </mc:Choice>
-    <mc:Fallback xmlns:p159="http://schemas.microsoft.com/office/powerpoint/2015/09/main" xmlns:p15="http://schemas.microsoft.com/office/powerpoint/2012/main" xmlns:a14="http://schemas.microsoft.com/office/drawing/2010/main" xmlns:wp="http://schemas.openxmlformats.org/drawingml/2006/wordprocessingDrawing" xmlns:w="http://schemas.openxmlformats.org/wordprocessingml/2006/main" xmlns:m="http://schemas.openxmlformats.org/officeDocument/2006/math" xmlns="">
+    <mc:Fallback xmlns="" xmlns:m="http://schemas.openxmlformats.org/officeDocument/2006/math" xmlns:w="http://schemas.openxmlformats.org/wordprocessingml/2006/main" xmlns:wp="http://schemas.openxmlformats.org/drawingml/2006/wordprocessingDrawing" xmlns:a14="http://schemas.microsoft.com/office/drawing/2010/main" xmlns:p15="http://schemas.microsoft.com/office/powerpoint/2012/main" xmlns:p159="http://schemas.microsoft.com/office/powerpoint/2015/09/main">
       <p:transition spd="med">
         <p:fade/>
       </p:transition>
@@ -7910,7 +7925,6 @@
               <a:rPr lang="en-US" sz="1800"/>
               <a:t>8. Testing</a:t>
             </a:r>
-            <a:endParaRPr lang="en-US" sz="1800"/>
           </a:p>
         </p:txBody>
       </p:sp>
@@ -7969,7 +7983,7 @@
         <p:fade/>
       </p:transition>
     </mc:Choice>
-    <mc:Fallback xmlns:p159="http://schemas.microsoft.com/office/powerpoint/2015/09/main" xmlns:p15="http://schemas.microsoft.com/office/powerpoint/2012/main" xmlns:a14="http://schemas.microsoft.com/office/drawing/2010/main" xmlns:wp="http://schemas.openxmlformats.org/drawingml/2006/wordprocessingDrawing" xmlns:w="http://schemas.openxmlformats.org/wordprocessingml/2006/main" xmlns:m="http://schemas.openxmlformats.org/officeDocument/2006/math" xmlns="">
+    <mc:Fallback xmlns="" xmlns:m="http://schemas.openxmlformats.org/officeDocument/2006/math" xmlns:w="http://schemas.openxmlformats.org/wordprocessingml/2006/main" xmlns:wp="http://schemas.openxmlformats.org/drawingml/2006/wordprocessingDrawing" xmlns:a14="http://schemas.microsoft.com/office/drawing/2010/main" xmlns:p15="http://schemas.microsoft.com/office/powerpoint/2012/main" xmlns:p159="http://schemas.microsoft.com/office/powerpoint/2015/09/main">
       <p:transition spd="med">
         <p:fade/>
       </p:transition>
@@ -8165,7 +8179,7 @@
             <a:pPr lvl="0"/>
             <a:r>
               <a:rPr lang="en-US" sz="1800"/>
-              <a:t xml:space="preserve">9. Back-Testing: </a:t>
+              <a:t>9. Back-Testing: </a:t>
             </a:r>
             <a:br>
               <a:rPr lang="en-US" sz="1400"/>
@@ -8177,7 +8191,6 @@
               <a:rPr lang="en-US" sz="1400" b="0"/>
               <a:t>This Covered Model solely implements analytical considerations that are set out in the applicable Criteria. The Criteria performance metrics are therefore used to confirm acceptable model performance. As the model relies solely on Criteria Validation back-testing, this slide will be completed by AQV at the same time the Model Validation Report is issued, summarizing the performance metrics for the model’s applicable Criteria.</a:t>
             </a:r>
-            <a:endParaRPr lang="en-US" sz="1400" b="0"/>
           </a:p>
         </p:txBody>
       </p:sp>
@@ -8470,7 +8483,7 @@
         <p:fade/>
       </p:transition>
     </mc:Choice>
-    <mc:Fallback xmlns:p159="http://schemas.microsoft.com/office/powerpoint/2015/09/main" xmlns:p15="http://schemas.microsoft.com/office/powerpoint/2012/main" xmlns:a14="http://schemas.microsoft.com/office/drawing/2010/main" xmlns:wp="http://schemas.openxmlformats.org/drawingml/2006/wordprocessingDrawing" xmlns:w="http://schemas.openxmlformats.org/wordprocessingml/2006/main" xmlns:m="http://schemas.openxmlformats.org/officeDocument/2006/math" xmlns="">
+    <mc:Fallback xmlns="" xmlns:m="http://schemas.openxmlformats.org/officeDocument/2006/math" xmlns:w="http://schemas.openxmlformats.org/wordprocessingml/2006/main" xmlns:wp="http://schemas.openxmlformats.org/drawingml/2006/wordprocessingDrawing" xmlns:a14="http://schemas.microsoft.com/office/drawing/2010/main" xmlns:p15="http://schemas.microsoft.com/office/powerpoint/2012/main" xmlns:p159="http://schemas.microsoft.com/office/powerpoint/2015/09/main">
       <p:transition spd="med">
         <p:fade/>
       </p:transition>
@@ -8612,7 +8625,7 @@
                 <a:ea typeface="MS PGothic" charset="0"/>
                 <a:cs typeface="Arial"/>
               </a:rPr>
-              <a:t xml:space="preserve">Summary of Validation Fieldwork: </a:t>
+              <a:t>Summary of Validation Fieldwork: </a:t>
             </a:r>
             <a:r>
               <a:rPr lang="en-US" sz="1400" b="0"/>
@@ -8640,7 +8653,7 @@
                 <a:latin typeface="Arial"/>
                 <a:cs typeface="Arial"/>
               </a:rPr>
-              <a:t xml:space="preserve">Comments/Findings: </a:t>
+              <a:t>Comments/Findings: </a:t>
             </a:r>
             <a:r>
               <a:rPr lang="en-US" sz="1400" b="0"/>
@@ -8669,14 +8682,14 @@
                 <a:latin typeface="Arial"/>
                 <a:cs typeface="Arial"/>
               </a:rPr>
-              <a:t xml:space="preserve">All identified issues have been fixed </a:t>
+              <a:t>All identified issues have been fixed </a:t>
             </a:r>
             <a:r>
               <a:rPr lang="en-US" sz="1400" b="0">
                 <a:latin typeface="Arial"/>
                 <a:cs typeface="Arial"/>
               </a:rPr>
-              <a:t xml:space="preserve">before the report was issued, and all Comments have been Resolved. AQV’s overall assessment of the </a:t>
+              <a:t>before the report was issued, and all Comments have been Resolved. AQV’s overall assessment of the </a:t>
             </a:r>
             <a:r>
               <a:rPr lang="en-US" sz="1400">
@@ -8845,7 +8858,7 @@
             </a:r>
             <a:r>
               <a:rPr lang="en-US" sz="1400" b="0"/>
-              <a:t xml:space="preserve"> Material change</a:t>
+              <a:t> Material change</a:t>
             </a:r>
           </a:p>
           <a:p>
@@ -8879,7 +8892,7 @@
             </a:pPr>
             <a:r>
               <a:rPr lang="en-US" sz="1400"/>
-              <a:t xml:space="preserve">Has training been completed? </a:t>
+              <a:t>Has training been completed? </a:t>
             </a:r>
             <a:r>
               <a:rPr lang="en-US" sz="1400" b="0"/>
@@ -8898,7 +8911,7 @@
             </a:pPr>
             <a:r>
               <a:rPr lang="en-US" sz="1400"/>
-              <a:t xml:space="preserve">Date of completed Model training – </a:t>
+              <a:t>Date of completed Model training – </a:t>
             </a:r>
             <a:r>
               <a:rPr lang="en-US" sz="1400" b="0"/>
@@ -9035,7 +9048,7 @@
             </a:pPr>
             <a:r>
               <a:rPr lang="en-US" sz="1800"/>
-              <a:t xml:space="preserve">Reason for Retirement Request:  </a:t>
+              <a:t>Reason for Retirement Request:  </a:t>
             </a:r>
           </a:p>
           <a:p>
@@ -9185,7 +9198,7 @@
             </a:br>
             <a:r>
               <a:rPr lang="en-US"/>
-              <a:t xml:space="preserve">	</a:t>
+              <a:t>	</a:t>
             </a:r>
             <a:r>
               <a:rPr lang="en-US">
@@ -9230,7 +9243,7 @@
                   <a:schemeClr val="bg1"/>
                 </a:solidFill>
               </a:rPr>
-              <a:t xml:space="preserve"> </a:t>
+              <a:t> </a:t>
             </a:r>
             <a:br>
               <a:rPr lang="en-US" sz="1000" b="1">
@@ -9383,7 +9396,7 @@
             </a:pPr>
             <a:r>
               <a:rPr lang="en-US" sz="1800"/>
-              <a:t xml:space="preserve">Executive Summary &amp; Project Background </a:t>
+              <a:t>Executive Summary &amp; Project Background </a:t>
             </a:r>
             <a:r>
               <a:rPr lang="en-US" sz="1800">
@@ -9562,7 +9575,7 @@
         <p:fade/>
       </p:transition>
     </mc:Choice>
-    <mc:Fallback xmlns:p159="http://schemas.microsoft.com/office/powerpoint/2015/09/main" xmlns:p15="http://schemas.microsoft.com/office/powerpoint/2012/main" xmlns:a14="http://schemas.microsoft.com/office/drawing/2010/main" xmlns:wp="http://schemas.openxmlformats.org/drawingml/2006/wordprocessingDrawing" xmlns:w="http://schemas.openxmlformats.org/wordprocessingml/2006/main" xmlns:m="http://schemas.openxmlformats.org/officeDocument/2006/math" xmlns="">
+    <mc:Fallback xmlns="" xmlns:m="http://schemas.openxmlformats.org/officeDocument/2006/math" xmlns:w="http://schemas.openxmlformats.org/wordprocessingml/2006/main" xmlns:wp="http://schemas.openxmlformats.org/drawingml/2006/wordprocessingDrawing" xmlns:a14="http://schemas.microsoft.com/office/drawing/2010/main" xmlns:p15="http://schemas.microsoft.com/office/powerpoint/2012/main" xmlns:p159="http://schemas.microsoft.com/office/powerpoint/2015/09/main">
       <p:transition spd="med">
         <p:fade/>
       </p:transition>
@@ -9624,7 +9637,7 @@
                 <a:latin typeface="Arial" pitchFamily="34" charset="0"/>
                 <a:cs typeface="Arial" pitchFamily="34" charset="0"/>
               </a:rPr>
-              <a:t xml:space="preserve"> IICRA RSR (R) RS-INS-GLB-R-001116-V001</a:t>
+              <a:t> IICRA RSR (R) RS-INS-GLB-R-001116-V001</a:t>
             </a:r>
           </a:p>
           <a:p>
@@ -9644,7 +9657,7 @@
                 <a:latin typeface="Arial" pitchFamily="34" charset="0"/>
                 <a:cs typeface="Arial" pitchFamily="34" charset="0"/>
               </a:rPr>
-              <a:t xml:space="preserve"> RS-INS-GLB-R-000463-V007 IICRA RSR (Excel)</a:t>
+              <a:t> RS-INS-GLB-R-000463-V007 IICRA RSR (Excel)</a:t>
             </a:r>
           </a:p>
           <a:p>
@@ -9664,7 +9677,7 @@
                 <a:latin typeface="Arial" pitchFamily="34" charset="0"/>
                 <a:cs typeface="Arial" pitchFamily="34" charset="0"/>
               </a:rPr>
-              <a:t xml:space="preserve"> RS-INS-GLB-R-000463-V007 IICRA RSR (Excel)</a:t>
+              <a:t> RS-INS-GLB-R-000463-V007 IICRA RSR (Excel)</a:t>
             </a:r>
           </a:p>
           <a:p>
@@ -9684,7 +9697,7 @@
                 <a:latin typeface="Arial" pitchFamily="34" charset="0"/>
                 <a:cs typeface="Arial" pitchFamily="34" charset="0"/>
               </a:rPr>
-              <a:t xml:space="preserve"> Ratings Model</a:t>
+              <a:t> Ratings Model</a:t>
             </a:r>
           </a:p>
           <a:p>
@@ -9704,7 +9717,7 @@
                 <a:latin typeface="Arial" pitchFamily="34" charset="0"/>
                 <a:cs typeface="Arial" pitchFamily="34" charset="0"/>
               </a:rPr>
-              <a:t xml:space="preserve">: This model is used to determine and document IICRAs (Insurance Industry and Country Risk Assessments), which are a step in the analytical process for rating insurance companies. Although the model does not produce a rating outcome, it facilitates the derivation of, and rating summary record-keeping for, IICRA assessments that feed into the derivation of the business risk profile for an insurance company. The model produces a final IICRA score based on the corresponding country risk and industry risk profile, ranging from 1 (strongest – very low risk) to 6 (weakest – very high risk). It is recoded in R from the IICRA RSR Excel model.</a:t>
+              <a:t>: This model is used to determine and document IICRAs (Insurance Industry and Country Risk Assessments), which are a step in the analytical process for rating insurance companies. Although the model does not produce a rating outcome, it facilitates the derivation of, and rating summary record-keeping for, IICRA assessments that feed into the derivation of the business risk profile for an insurance company. The model produces a final IICRA score based on the corresponding country risk and industry risk profile, ranging from 1 (strongest – very low risk) to 6 (weakest – very high risk). It is recoded in R from the IICRA RSR Excel model.</a:t>
             </a:r>
           </a:p>
           <a:p>
@@ -9717,7 +9730,7 @@
                 <a:latin typeface="Arial" pitchFamily="34" charset="0"/>
                 <a:cs typeface="Arial" pitchFamily="34" charset="0"/>
               </a:rPr>
-              <a:t xml:space="preserve">Region: </a:t>
+              <a:t>Region: </a:t>
             </a:r>
             <a:r>
               <a:rPr lang="en-US" sz="1200" b="0">
@@ -9737,7 +9750,7 @@
                 <a:latin typeface="Arial" pitchFamily="34" charset="0"/>
                 <a:cs typeface="Arial" pitchFamily="34" charset="0"/>
               </a:rPr>
-              <a:t xml:space="preserve">Business: </a:t>
+              <a:t>Business: </a:t>
             </a:r>
             <a:r>
               <a:rPr lang="en-US" sz="1200" b="0">
@@ -9764,7 +9777,7 @@
                 <a:latin typeface="Arial" pitchFamily="34" charset="0"/>
                 <a:cs typeface="Arial" pitchFamily="34" charset="0"/>
               </a:rPr>
-              <a:t xml:space="preserve"> N/A</a:t>
+              <a:t> N/A</a:t>
             </a:r>
           </a:p>
           <a:p>
@@ -9777,7 +9790,7 @@
                 <a:latin typeface="Arial" pitchFamily="34" charset="0"/>
                 <a:cs typeface="Arial" pitchFamily="34" charset="0"/>
               </a:rPr>
-              <a:t xml:space="preserve">Actual or expected usage: </a:t>
+              <a:t>Actual or expected usage: </a:t>
             </a:r>
             <a:r>
               <a:rPr lang="en-US" sz="1200" b="0">
@@ -9797,7 +9810,7 @@
                 <a:latin typeface="Arial" pitchFamily="34" charset="0"/>
                 <a:cs typeface="Arial" pitchFamily="34" charset="0"/>
               </a:rPr>
-              <a:t xml:space="preserve">Time frame during which model is expected to remain valid: </a:t>
+              <a:t>Time frame during which model is expected to remain valid: </a:t>
             </a:r>
             <a:r>
               <a:rPr lang="en-US" sz="1200" b="0">
@@ -9817,14 +9830,14 @@
                 <a:latin typeface="Arial" pitchFamily="34" charset="0"/>
                 <a:cs typeface="Arial" pitchFamily="34" charset="0"/>
               </a:rPr>
-              <a:t xml:space="preserve">Squad:  </a:t>
+              <a:t>Squad:  </a:t>
             </a:r>
             <a:r>
               <a:rPr lang="en-US" sz="1200" b="0">
                 <a:latin typeface="Arial" pitchFamily="34" charset="0"/>
                 <a:cs typeface="Arial" pitchFamily="34" charset="0"/>
               </a:rPr>
-              <a:t xml:space="preserve"> </a:t>
+              <a:t> </a:t>
             </a:r>
             <a:r>
               <a:rPr lang="en-US" sz="1200" b="0" i="1">
@@ -9838,7 +9851,7 @@
                 <a:latin typeface="Arial" pitchFamily="34" charset="0"/>
                 <a:cs typeface="Arial" pitchFamily="34" charset="0"/>
               </a:rPr>
-              <a:t xml:space="preserve">: </a:t>
+              <a:t>: </a:t>
             </a:r>
           </a:p>
           <a:p>
@@ -9851,14 +9864,20 @@
                 <a:latin typeface="Arial" pitchFamily="34" charset="0"/>
                 <a:cs typeface="Arial" pitchFamily="34" charset="0"/>
               </a:rPr>
-              <a:t>Developer:</a:t>
-            </a:r>
+              <a:t>Developer: Derek Ding</a:t>
+            </a:r>
+          </a:p>
+          <a:p>
+            <a:pPr marL="1484313" lvl="5" indent="-342900">
+              <a:buFont typeface="Wingdings" panose="05000000000000000000" pitchFamily="2" charset="2"/>
+              <a:buChar char="§"/>
+            </a:pPr>
             <a:r>
               <a:rPr lang="en-US" sz="1200" b="0" i="1">
                 <a:latin typeface="Arial" pitchFamily="34" charset="0"/>
                 <a:cs typeface="Arial" pitchFamily="34" charset="0"/>
               </a:rPr>
-              <a:t xml:space="preserve"> Derek Ding</a:t>
+              <a:t>Tester (must be different than Developer): Anoop Garg</a:t>
             </a:r>
           </a:p>
           <a:p>
@@ -9871,47 +9890,20 @@
                 <a:latin typeface="Arial" pitchFamily="34" charset="0"/>
                 <a:cs typeface="Arial" pitchFamily="34" charset="0"/>
               </a:rPr>
-              <a:t>Tester (must be different than Developer):</a:t>
-            </a:r>
+              <a:t>Squad Leader/Model Owner: Derek Ding</a:t>
+            </a:r>
+          </a:p>
+          <a:p>
+            <a:pPr marL="1484313" lvl="5" indent="-342900">
+              <a:buFont typeface="Wingdings" panose="05000000000000000000" pitchFamily="2" charset="2"/>
+              <a:buChar char="§"/>
+            </a:pPr>
             <a:r>
               <a:rPr lang="en-US" sz="1200" b="0" i="1">
                 <a:latin typeface="Arial" pitchFamily="34" charset="0"/>
                 <a:cs typeface="Arial" pitchFamily="34" charset="0"/>
               </a:rPr>
-              <a:t xml:space="preserve"> Anoop Garg</a:t>
-            </a:r>
-          </a:p>
-          <a:p>
-            <a:pPr marL="1484313" lvl="5" indent="-342900">
-              <a:buFont typeface="Wingdings" panose="05000000000000000000" pitchFamily="2" charset="2"/>
-              <a:buChar char="§"/>
-            </a:pPr>
-            <a:r>
-              <a:rPr lang="en-US" sz="1200" b="0" i="1">
-                <a:latin typeface="Arial" pitchFamily="34" charset="0"/>
-                <a:cs typeface="Arial" pitchFamily="34" charset="0"/>
-              </a:rPr>
-              <a:t>Squad Leader/Model Owner:</a:t>
-            </a:r>
-            <a:r>
-              <a:rPr lang="en-US" sz="1200" b="0" i="1">
-                <a:latin typeface="Arial" pitchFamily="34" charset="0"/>
-                <a:cs typeface="Arial" pitchFamily="34" charset="0"/>
-              </a:rPr>
-              <a:t xml:space="preserve"> Derek Ding</a:t>
-            </a:r>
-          </a:p>
-          <a:p>
-            <a:pPr marL="1484313" lvl="5" indent="-342900">
-              <a:buFont typeface="Wingdings" panose="05000000000000000000" pitchFamily="2" charset="2"/>
-              <a:buChar char="§"/>
-            </a:pPr>
-            <a:r>
-              <a:rPr lang="en-US" sz="1200" b="0" i="1">
-                <a:latin typeface="Arial" pitchFamily="34" charset="0"/>
-                <a:cs typeface="Arial" pitchFamily="34" charset="0"/>
-              </a:rPr>
-              <a:t xml:space="preserve">Model Coordinator/Approver:	 </a:t>
+              <a:t>Model Coordinator/Approver:	 </a:t>
             </a:r>
             <a:endParaRPr lang="en-US" sz="1200" i="1">
               <a:latin typeface="Arial" pitchFamily="34" charset="0"/>
@@ -9991,7 +9983,7 @@
         <p:fade/>
       </p:transition>
     </mc:Choice>
-    <mc:Fallback xmlns:p159="http://schemas.microsoft.com/office/powerpoint/2015/09/main" xmlns:p15="http://schemas.microsoft.com/office/powerpoint/2012/main" xmlns:a14="http://schemas.microsoft.com/office/drawing/2010/main" xmlns:wp="http://schemas.openxmlformats.org/drawingml/2006/wordprocessingDrawing" xmlns:w="http://schemas.openxmlformats.org/wordprocessingml/2006/main" xmlns:m="http://schemas.openxmlformats.org/officeDocument/2006/math" xmlns="">
+    <mc:Fallback xmlns="" xmlns:m="http://schemas.openxmlformats.org/officeDocument/2006/math" xmlns:w="http://schemas.openxmlformats.org/wordprocessingml/2006/main" xmlns:wp="http://schemas.openxmlformats.org/drawingml/2006/wordprocessingDrawing" xmlns:a14="http://schemas.microsoft.com/office/drawing/2010/main" xmlns:p15="http://schemas.microsoft.com/office/powerpoint/2012/main" xmlns:p159="http://schemas.microsoft.com/office/powerpoint/2015/09/main">
       <p:transition spd="med">
         <p:fade/>
       </p:transition>
@@ -10047,9 +10039,8 @@
             </a:r>
             <a:r>
               <a:rPr lang="en-US" sz="1000" b="0"/>
-              <a:t xml:space="preserve"> N/A – IICRA RSR (R) is not a Project Finance model.</a:t>
-            </a:r>
-            <a:endParaRPr lang="en-US" sz="1000" b="0"/>
+              <a:t> N/A – IICRA RSR (R) is not a Project Finance model.</a:t>
+            </a:r>
           </a:p>
           <a:p>
             <a:pPr marL="342900" indent="-342900">
@@ -10062,9 +10053,8 @@
             </a:r>
             <a:r>
               <a:rPr lang="en-US" sz="1000" b="0"/>
-              <a:t xml:space="preserve"> N/A</a:t>
-            </a:r>
-            <a:endParaRPr lang="en-US" sz="1000" b="0"/>
+              <a:t> N/A</a:t>
+            </a:r>
           </a:p>
           <a:p>
             <a:pPr marL="342900" indent="-342900">
@@ -10077,9 +10067,8 @@
             </a:r>
             <a:r>
               <a:rPr lang="en-US" sz="1000" b="0"/>
-              <a:t xml:space="preserve"> N/A</a:t>
-            </a:r>
-            <a:endParaRPr lang="en-US" sz="1000" b="0"/>
+              <a:t> N/A</a:t>
+            </a:r>
           </a:p>
           <a:p>
             <a:pPr marL="342900" indent="-342900">
@@ -10092,9 +10081,8 @@
             </a:r>
             <a:r>
               <a:rPr lang="en-US" sz="1000" b="0"/>
-              <a:t xml:space="preserve"> N/A</a:t>
-            </a:r>
-            <a:endParaRPr lang="en-US" sz="1000" b="0"/>
+              <a:t> N/A</a:t>
+            </a:r>
           </a:p>
           <a:p>
             <a:pPr marL="342900" indent="-342900">
@@ -10107,9 +10095,8 @@
             </a:r>
             <a:r>
               <a:rPr lang="en-US" sz="1000" b="0"/>
-              <a:t xml:space="preserve"> N/A</a:t>
-            </a:r>
-            <a:endParaRPr lang="en-US" sz="1000" b="0"/>
+              <a:t> N/A</a:t>
+            </a:r>
           </a:p>
         </p:txBody>
       </p:sp>
@@ -10135,7 +10122,7 @@
           <a:p>
             <a:r>
               <a:rPr lang="en-US" sz="1800"/>
-              <a:t xml:space="preserve">1. Project Background: </a:t>
+              <a:t>1. Project Background: </a:t>
             </a:r>
             <a:r>
               <a:rPr lang="en-US" sz="1800">
@@ -10511,14 +10498,6 @@
                         </a:rPr>
                         <a:t>C-EN-11017264-10</a:t>
                       </a:r>
-                      <a:endParaRPr lang="en-US" sz="1200">
-                        <a:solidFill>
-                          <a:srgbClr val="000000"/>
-                        </a:solidFill>
-                        <a:effectLst/>
-                        <a:latin typeface="Arial"/>
-                        <a:ea typeface="Calibri"/>
-                      </a:endParaRPr>
                     </a:p>
                   </a:txBody>
                   <a:tcPr marL="68580" marR="68580" marT="0" marB="0" anchor="ctr"/>
@@ -10544,14 +10523,6 @@
                         </a:rPr>
                         <a:t>Jul 01, 2019</a:t>
                       </a:r>
-                      <a:endParaRPr lang="en-US" sz="1200">
-                        <a:solidFill>
-                          <a:srgbClr val="000000"/>
-                        </a:solidFill>
-                        <a:effectLst/>
-                        <a:latin typeface="Arial"/>
-                        <a:ea typeface="Calibri"/>
-                      </a:endParaRPr>
                     </a:p>
                   </a:txBody>
                   <a:tcPr marL="68580" marR="68580" marT="0" marB="0" anchor="ctr"/>
@@ -10577,14 +10548,6 @@
                         </a:rPr>
                         <a:t>Insurers Rating Methodology</a:t>
                       </a:r>
-                      <a:endParaRPr lang="en-US" sz="1200">
-                        <a:solidFill>
-                          <a:srgbClr val="000000"/>
-                        </a:solidFill>
-                        <a:effectLst/>
-                        <a:latin typeface="Arial"/>
-                        <a:ea typeface="Calibri"/>
-                      </a:endParaRPr>
                     </a:p>
                   </a:txBody>
                   <a:tcPr marL="68580" marR="68580" marT="0" marB="0" anchor="ctr"/>
@@ -11051,7 +11014,7 @@
         <p:fade/>
       </p:transition>
     </mc:Choice>
-    <mc:Fallback xmlns:p159="http://schemas.microsoft.com/office/powerpoint/2015/09/main" xmlns:p15="http://schemas.microsoft.com/office/powerpoint/2012/main" xmlns:a14="http://schemas.microsoft.com/office/drawing/2010/main" xmlns:wp="http://schemas.openxmlformats.org/drawingml/2006/wordprocessingDrawing" xmlns:w="http://schemas.openxmlformats.org/wordprocessingml/2006/main" xmlns:m="http://schemas.openxmlformats.org/officeDocument/2006/math" xmlns="">
+    <mc:Fallback xmlns="" xmlns:m="http://schemas.openxmlformats.org/officeDocument/2006/math" xmlns:w="http://schemas.openxmlformats.org/wordprocessingml/2006/main" xmlns:wp="http://schemas.openxmlformats.org/drawingml/2006/wordprocessingDrawing" xmlns:a14="http://schemas.microsoft.com/office/drawing/2010/main" xmlns:p15="http://schemas.microsoft.com/office/powerpoint/2012/main" xmlns:p159="http://schemas.microsoft.com/office/powerpoint/2015/09/main">
       <p:transition spd="med">
         <p:fade/>
       </p:transition>
@@ -11103,13 +11066,12 @@
             </a:pPr>
             <a:r>
               <a:rPr lang="en-US" sz="1400"/>
-              <a:t xml:space="preserve">Lead Model Developer: </a:t>
+              <a:t>Lead Model Developer: </a:t>
             </a:r>
             <a:r>
               <a:rPr lang="en-US" sz="1400" b="0"/>
               <a:t>Derek Ding</a:t>
             </a:r>
-            <a:endParaRPr lang="en-US" sz="1400" b="0"/>
           </a:p>
           <a:p>
             <a:pPr marL="342900" indent="-342900">
@@ -11125,13 +11087,12 @@
             </a:pPr>
             <a:r>
               <a:rPr lang="en-US" sz="1400" i="1"/>
-              <a:t xml:space="preserve">Platform for model deployment:  </a:t>
+              <a:t>Platform for model deployment:  </a:t>
             </a:r>
             <a:r>
               <a:rPr lang="en-US" sz="1400" b="0" i="1"/>
               <a:t>R</a:t>
             </a:r>
-            <a:endParaRPr lang="en-US" sz="1400" b="0" i="1"/>
           </a:p>
           <a:p>
             <a:pPr marL="342900" indent="-342900">
@@ -11151,7 +11112,7 @@
             </a:r>
             <a:r>
               <a:rPr lang="en-US" sz="1400" b="0"/>
-              <a:t xml:space="preserve"> [TBD]</a:t>
+              <a:t> [TBD]</a:t>
             </a:r>
           </a:p>
           <a:p>
@@ -11181,7 +11142,6 @@
               <a:rPr lang="en-US" sz="1400" b="0"/>
               <a:t>Type of Inputs: country risk assessment; industry risk assessment; and adjustment, if applicable.</a:t>
             </a:r>
-            <a:endParaRPr lang="en-US" sz="1400" b="0"/>
           </a:p>
           <a:p>
             <a:pPr marL="576263" lvl="1" indent="-342900">
@@ -11192,7 +11152,6 @@
               <a:rPr lang="en-US" sz="1400" b="0"/>
               <a:t>Additional inputs to assist the assessment of industry risk: profitability, product risk, barriers to entry, market growth prospects, and institutional framework.</a:t>
             </a:r>
-            <a:endParaRPr lang="en-US" sz="1400" b="0"/>
           </a:p>
           <a:p>
             <a:pPr marL="576263" lvl="1" indent="-342900">
@@ -11203,7 +11162,6 @@
               <a:rPr lang="en-US" sz="1400" b="0"/>
               <a:t>Source of Inputs: user input / analyst assessment.</a:t>
             </a:r>
-            <a:endParaRPr lang="en-US" sz="1400" b="0"/>
           </a:p>
           <a:p>
             <a:pPr marL="342900" indent="-342900">
@@ -11216,7 +11174,7 @@
             </a:r>
             <a:r>
               <a:rPr lang="en-US" sz="1400" b="0"/>
-              <a:t xml:space="preserve"> unit testing, UI testing, integration testing (within the Analytical Desktop workflow system), and Criteria Validation Report.</a:t>
+              <a:t> unit testing, UI testing, integration testing (within the Analytical Desktop workflow system), and Criteria Validation Report.</a:t>
             </a:r>
             <a:br>
               <a:rPr lang="en-US" sz="1400" b="0"/>
@@ -11234,7 +11192,7 @@
             </a:r>
             <a:r>
               <a:rPr lang="en-US" sz="1400" b="0"/>
-              <a:t xml:space="preserve"> [TBD]</a:t>
+              <a:t> [TBD]</a:t>
             </a:r>
           </a:p>
           <a:p>
@@ -11308,7 +11266,7 @@
           <a:p>
             <a:r>
               <a:rPr lang="en-US" sz="1800"/>
-              <a:t xml:space="preserve">3. Development Information: </a:t>
+              <a:t>3. Development Information: </a:t>
             </a:r>
           </a:p>
         </p:txBody>
@@ -11329,7 +11287,7 @@
         <p:fade/>
       </p:transition>
     </mc:Choice>
-    <mc:Fallback xmlns:p159="http://schemas.microsoft.com/office/powerpoint/2015/09/main" xmlns:p15="http://schemas.microsoft.com/office/powerpoint/2012/main" xmlns:a14="http://schemas.microsoft.com/office/drawing/2010/main" xmlns:wp="http://schemas.openxmlformats.org/drawingml/2006/wordprocessingDrawing" xmlns:w="http://schemas.openxmlformats.org/wordprocessingml/2006/main" xmlns:m="http://schemas.openxmlformats.org/officeDocument/2006/math" xmlns="">
+    <mc:Fallback xmlns="" xmlns:m="http://schemas.openxmlformats.org/officeDocument/2006/math" xmlns:w="http://schemas.openxmlformats.org/wordprocessingml/2006/main" xmlns:wp="http://schemas.openxmlformats.org/drawingml/2006/wordprocessingDrawing" xmlns:a14="http://schemas.microsoft.com/office/drawing/2010/main" xmlns:p15="http://schemas.microsoft.com/office/powerpoint/2012/main" xmlns:p159="http://schemas.microsoft.com/office/powerpoint/2015/09/main">
       <p:transition spd="med">
         <p:fade/>
       </p:transition>
@@ -11638,7 +11596,7 @@
                 <a:latin typeface="Arial" pitchFamily="34" charset="0"/>
                 <a:cs typeface="Arial" pitchFamily="34" charset="0"/>
               </a:rPr>
-              <a:t xml:space="preserve">  </a:t>
+              <a:t>  </a:t>
             </a:r>
           </a:p>
           <a:p>
@@ -11689,7 +11647,7 @@
         <p:fade/>
       </p:transition>
     </mc:Choice>
-    <mc:Fallback xmlns:p159="http://schemas.microsoft.com/office/powerpoint/2015/09/main" xmlns:p15="http://schemas.microsoft.com/office/powerpoint/2012/main" xmlns:a14="http://schemas.microsoft.com/office/drawing/2010/main" xmlns:wp="http://schemas.openxmlformats.org/drawingml/2006/wordprocessingDrawing" xmlns:w="http://schemas.openxmlformats.org/wordprocessingml/2006/main" xmlns:m="http://schemas.openxmlformats.org/officeDocument/2006/math" xmlns="">
+    <mc:Fallback xmlns="" xmlns:m="http://schemas.openxmlformats.org/officeDocument/2006/math" xmlns:w="http://schemas.openxmlformats.org/wordprocessingml/2006/main" xmlns:wp="http://schemas.openxmlformats.org/drawingml/2006/wordprocessingDrawing" xmlns:a14="http://schemas.microsoft.com/office/drawing/2010/main" xmlns:p15="http://schemas.microsoft.com/office/powerpoint/2012/main" xmlns:p159="http://schemas.microsoft.com/office/powerpoint/2015/09/main">
       <p:transition spd="med">
         <p:fade/>
       </p:transition>
@@ -11762,7 +11720,6 @@
               <a:rPr lang="en-US" sz="1800"/>
               <a:t>5. Key Model Assumptions:</a:t>
             </a:r>
-            <a:endParaRPr lang="en-US" sz="1800"/>
           </a:p>
         </p:txBody>
       </p:sp>
@@ -11907,7 +11864,7 @@
                       </a:r>
                       <a:r>
                         <a:rPr lang="en-US" sz="1400" baseline="0"/>
-                        <a:t xml:space="preserve"> </a:t>
+                        <a:t> </a:t>
                       </a:r>
                       <a:r>
                         <a:rPr lang="en-US" sz="1400"/>
@@ -11922,7 +11879,7 @@
                       </a:r>
                       <a:r>
                         <a:rPr lang="en-US" sz="1400" baseline="0"/>
-                        <a:t xml:space="preserve"> </a:t>
+                        <a:t> </a:t>
                       </a:r>
                       <a:r>
                         <a:rPr lang="en-US" sz="1400"/>
@@ -12141,7 +12098,6 @@
                         <a:rPr lang="en-US" sz="1400"/>
                         <a:t>The model assumes that the final IICRA score is solely derived from assumptions relating to industry and country risk factors.</a:t>
                       </a:r>
-                      <a:endParaRPr lang="en-US" sz="1400"/>
                     </a:p>
                   </a:txBody>
                   <a:tcPr anchor="ctr"/>
@@ -12192,7 +12148,6 @@
                         <a:rPr lang="en-US" sz="1400"/>
                         <a:t>X</a:t>
                       </a:r>
-                      <a:endParaRPr lang="en-US" sz="1400"/>
                     </a:p>
                   </a:txBody>
                   <a:tcPr anchor="ctr"/>
@@ -12265,7 +12220,6 @@
                         <a:rPr lang="en-US" sz="1400"/>
                         <a:t>X</a:t>
                       </a:r>
-                      <a:endParaRPr lang="en-US" sz="1400"/>
                     </a:p>
                   </a:txBody>
                   <a:tcPr anchor="ctr"/>
@@ -12354,7 +12308,7 @@
         <p:fade/>
       </p:transition>
     </mc:Choice>
-    <mc:Fallback xmlns:p159="http://schemas.microsoft.com/office/powerpoint/2015/09/main" xmlns:p15="http://schemas.microsoft.com/office/powerpoint/2012/main" xmlns:a14="http://schemas.microsoft.com/office/drawing/2010/main" xmlns:wp="http://schemas.openxmlformats.org/drawingml/2006/wordprocessingDrawing" xmlns:w="http://schemas.openxmlformats.org/wordprocessingml/2006/main" xmlns:m="http://schemas.openxmlformats.org/officeDocument/2006/math" xmlns="">
+    <mc:Fallback xmlns="" xmlns:m="http://schemas.openxmlformats.org/officeDocument/2006/math" xmlns:w="http://schemas.openxmlformats.org/wordprocessingml/2006/main" xmlns:wp="http://schemas.openxmlformats.org/drawingml/2006/wordprocessingDrawing" xmlns:a14="http://schemas.microsoft.com/office/drawing/2010/main" xmlns:p15="http://schemas.microsoft.com/office/powerpoint/2012/main" xmlns:p159="http://schemas.microsoft.com/office/powerpoint/2015/09/main">
       <p:transition spd="med">
         <p:fade/>
       </p:transition>
@@ -12518,7 +12472,7 @@
                       </a:r>
                       <a:r>
                         <a:rPr lang="en-US" sz="1400" baseline="0"/>
-                        <a:t xml:space="preserve"> in model</a:t>
+                        <a:t> in model</a:t>
                       </a:r>
                       <a:endParaRPr lang="en-US" sz="1400"/>
                     </a:p>
@@ -12649,7 +12603,6 @@
                         <a:rPr lang="en-US" sz="1400"/>
                         <a:t>The model assumes that the final IICRA score is solely derived from assumptions relating to industry and country risk factors.</a:t>
                       </a:r>
-                      <a:endParaRPr lang="en-US" sz="1400"/>
                     </a:p>
                   </a:txBody>
                   <a:tcPr anchor="ctr"/>
@@ -12679,7 +12632,6 @@
                         <a:rPr lang="en-US" sz="1400"/>
                         <a:t>X</a:t>
                       </a:r>
-                      <a:endParaRPr lang="en-US" sz="1400"/>
                     </a:p>
                   </a:txBody>
                   <a:tcPr anchor="ctr"/>
@@ -12731,6 +12683,7 @@
                         <a:buNone/>
                         <a:defRPr/>
                       </a:pPr>
+                      <a:endParaRPr/>
                     </a:p>
                   </a:txBody>
                   <a:tcPr anchor="ctr"/>
@@ -12796,7 +12749,6 @@
                         <a:rPr lang="en-US" sz="1400"/>
                         <a:t>X</a:t>
                       </a:r>
-                      <a:endParaRPr lang="en-US" sz="1400"/>
                     </a:p>
                   </a:txBody>
                   <a:tcPr anchor="ctr"/>
@@ -12848,6 +12800,7 @@
                         <a:buNone/>
                         <a:defRPr/>
                       </a:pPr>
+                      <a:endParaRPr/>
                     </a:p>
                   </a:txBody>
                   <a:tcPr anchor="ctr"/>
@@ -12878,7 +12831,7 @@
         <p:fade/>
       </p:transition>
     </mc:Choice>
-    <mc:Fallback xmlns:p159="http://schemas.microsoft.com/office/powerpoint/2015/09/main" xmlns:p15="http://schemas.microsoft.com/office/powerpoint/2012/main" xmlns:a14="http://schemas.microsoft.com/office/drawing/2010/main" xmlns:wp="http://schemas.openxmlformats.org/drawingml/2006/wordprocessingDrawing" xmlns:w="http://schemas.openxmlformats.org/wordprocessingml/2006/main" xmlns:m="http://schemas.openxmlformats.org/officeDocument/2006/math" xmlns="">
+    <mc:Fallback xmlns="" xmlns:m="http://schemas.openxmlformats.org/officeDocument/2006/math" xmlns:w="http://schemas.openxmlformats.org/wordprocessingml/2006/main" xmlns:wp="http://schemas.openxmlformats.org/drawingml/2006/wordprocessingDrawing" xmlns:a14="http://schemas.microsoft.com/office/drawing/2010/main" xmlns:p15="http://schemas.microsoft.com/office/powerpoint/2012/main" xmlns:p159="http://schemas.microsoft.com/office/powerpoint/2015/09/main">
       <p:transition spd="med">
         <p:fade/>
       </p:transition>
